--- a/tests/OfficeAgent.Tests/Corpus/v1.0.0/native/outputs/p-headerfooter.pptx
+++ b/tests/OfficeAgent.Tests/Corpus/v1.0.0/native/outputs/p-headerfooter.pptx
@@ -2,12 +2,12 @@
 <file path=ppt/presentation.xml><?xml version="1.0" encoding="utf-8"?>
 <p:presentation xmlns:r="http://schemas.openxmlformats.org/officeDocument/2006/relationships" xmlns:p="http://schemas.openxmlformats.org/presentationml/2006/main">
   <p:sldMasterIdLst>
-    <p:sldMasterId xmlns:r="http://schemas.openxmlformats.org/officeDocument/2006/relationships" id="2147483648" r:id="R0ab58c605feb4204"/>
+    <p:sldMasterId xmlns:r="http://schemas.openxmlformats.org/officeDocument/2006/relationships" id="2147483648" r:id="R76bda88eb0624f9d"/>
   </p:sldMasterIdLst>
   <p:sldIdLst>
-    <p:sldId xmlns:r="http://schemas.openxmlformats.org/officeDocument/2006/relationships" id="256" r:id="R33962d7d4f714ce4"/>
-    <p:sldId id="257" r:id="R3e7d0a5869754182"/>
-    <p:sldId id="258" r:id="Re5a9dc5d4eaf4c80"/>
+    <p:sldId xmlns:r="http://schemas.openxmlformats.org/officeDocument/2006/relationships" id="256" r:id="R684ffe9accf445f1"/>
+    <p:sldId id="257" r:id="R3c5854fdf73e416f"/>
+    <p:sldId id="258" r:id="R6494006b594349d1"/>
   </p:sldIdLst>
   <p:sldSz cx="12192000" cy="6858000"/>
   <p:notesSz cx="6858000" cy="9144000"/>
@@ -892,11 +892,11 @@
   </p:cSld>
   <p:clrMap bg1="lt1" tx1="dk1" bg2="lt2" tx2="dk2" accent1="accent1" accent2="accent2" accent3="accent3" accent4="accent4" accent5="accent5" accent6="accent6" hlink="hlink" folHlink="folHlink"/>
   <p:sldLayoutIdLst>
-    <p:sldLayoutId xmlns:r="http://schemas.openxmlformats.org/officeDocument/2006/relationships" id="2147483649" r:id="Ra670d069709940c5"/>
-    <p:sldLayoutId xmlns:r="http://schemas.openxmlformats.org/officeDocument/2006/relationships" id="2147483650" r:id="R1b1005d2313a4b86"/>
-    <p:sldLayoutId xmlns:r="http://schemas.openxmlformats.org/officeDocument/2006/relationships" id="2147483651" r:id="R9531f8f9386f4fbd"/>
-    <p:sldLayoutId xmlns:r="http://schemas.openxmlformats.org/officeDocument/2006/relationships" id="2147483652" r:id="Rdffa033a6084425a"/>
-    <p:sldLayoutId xmlns:r="http://schemas.openxmlformats.org/officeDocument/2006/relationships" id="2147483653" r:id="Rd39fb83ad9044654"/>
+    <p:sldLayoutId xmlns:r="http://schemas.openxmlformats.org/officeDocument/2006/relationships" id="2147483649" r:id="Ra872dfd9a6a64976"/>
+    <p:sldLayoutId xmlns:r="http://schemas.openxmlformats.org/officeDocument/2006/relationships" id="2147483650" r:id="R3d95fb8d3b334987"/>
+    <p:sldLayoutId xmlns:r="http://schemas.openxmlformats.org/officeDocument/2006/relationships" id="2147483651" r:id="R8d019356bb65479d"/>
+    <p:sldLayoutId xmlns:r="http://schemas.openxmlformats.org/officeDocument/2006/relationships" id="2147483652" r:id="R5f8f9cd40d5c4934"/>
+    <p:sldLayoutId xmlns:r="http://schemas.openxmlformats.org/officeDocument/2006/relationships" id="2147483653" r:id="Rfd775e80255e4975"/>
   </p:sldLayoutIdLst>
 </p:sldMaster>
 </file>
@@ -1074,7 +1074,7 @@
           <a:bodyPr/>
           <a:lstStyle/>
           <a:p>
-            <a:fld id="{1DC8BB14-85C2-4575-AFB1-27CC9869C938}" type="slidenum">
+            <a:fld id="{1A7FA1D8-8F82-48C1-BF44-7146745DB65D}" type="slidenum">
               <a:rPr lang="en-US"/>
               <a:t>1</a:t>
             </a:fld>
@@ -1183,7 +1183,7 @@
           <a:bodyPr/>
           <a:lstStyle/>
           <a:p>
-            <a:fld id="{4481BECB-7A9B-42B0-B9A7-E9067DE74EE9}" type="slidenum">
+            <a:fld id="{68C99C14-919F-4151-BA8E-5A30831E1485}" type="slidenum">
               <a:rPr lang="en-US"/>
               <a:t>1</a:t>
             </a:fld>
@@ -1286,7 +1286,7 @@
           <a:bodyPr/>
           <a:lstStyle/>
           <a:p>
-            <a:fld id="{C8776929-6039-4855-803C-09DCEB70F126}" type="slidenum">
+            <a:fld id="{E0B1CB9A-3D87-4CF2-A074-FCF19F8030AD}" type="slidenum">
               <a:rPr lang="en-US"/>
               <a:t>1</a:t>
             </a:fld>

--- a/tests/OfficeAgent.Tests/Corpus/v1.0.0/native/outputs/p-headerfooter.pptx
+++ b/tests/OfficeAgent.Tests/Corpus/v1.0.0/native/outputs/p-headerfooter.pptx
@@ -2,12 +2,12 @@
 <file path=ppt/presentation.xml><?xml version="1.0" encoding="utf-8"?>
 <p:presentation xmlns:r="http://schemas.openxmlformats.org/officeDocument/2006/relationships" xmlns:p="http://schemas.openxmlformats.org/presentationml/2006/main">
   <p:sldMasterIdLst>
-    <p:sldMasterId xmlns:r="http://schemas.openxmlformats.org/officeDocument/2006/relationships" id="2147483648" r:id="R76bda88eb0624f9d"/>
+    <p:sldMasterId xmlns:r="http://schemas.openxmlformats.org/officeDocument/2006/relationships" id="2147483648" r:id="R570c7f128a9d41bd"/>
   </p:sldMasterIdLst>
   <p:sldIdLst>
-    <p:sldId xmlns:r="http://schemas.openxmlformats.org/officeDocument/2006/relationships" id="256" r:id="R684ffe9accf445f1"/>
-    <p:sldId id="257" r:id="R3c5854fdf73e416f"/>
-    <p:sldId id="258" r:id="R6494006b594349d1"/>
+    <p:sldId xmlns:r="http://schemas.openxmlformats.org/officeDocument/2006/relationships" id="256" r:id="R99ef8e78f19b43dd"/>
+    <p:sldId id="257" r:id="R93104dc9e1204b9f"/>
+    <p:sldId id="258" r:id="Rbefaa6c0b4f942e3"/>
   </p:sldIdLst>
   <p:sldSz cx="12192000" cy="6858000"/>
   <p:notesSz cx="6858000" cy="9144000"/>
@@ -892,11 +892,11 @@
   </p:cSld>
   <p:clrMap bg1="lt1" tx1="dk1" bg2="lt2" tx2="dk2" accent1="accent1" accent2="accent2" accent3="accent3" accent4="accent4" accent5="accent5" accent6="accent6" hlink="hlink" folHlink="folHlink"/>
   <p:sldLayoutIdLst>
-    <p:sldLayoutId xmlns:r="http://schemas.openxmlformats.org/officeDocument/2006/relationships" id="2147483649" r:id="Ra872dfd9a6a64976"/>
-    <p:sldLayoutId xmlns:r="http://schemas.openxmlformats.org/officeDocument/2006/relationships" id="2147483650" r:id="R3d95fb8d3b334987"/>
-    <p:sldLayoutId xmlns:r="http://schemas.openxmlformats.org/officeDocument/2006/relationships" id="2147483651" r:id="R8d019356bb65479d"/>
-    <p:sldLayoutId xmlns:r="http://schemas.openxmlformats.org/officeDocument/2006/relationships" id="2147483652" r:id="R5f8f9cd40d5c4934"/>
-    <p:sldLayoutId xmlns:r="http://schemas.openxmlformats.org/officeDocument/2006/relationships" id="2147483653" r:id="Rfd775e80255e4975"/>
+    <p:sldLayoutId xmlns:r="http://schemas.openxmlformats.org/officeDocument/2006/relationships" id="2147483649" r:id="R25cb8f6de14f42bd"/>
+    <p:sldLayoutId xmlns:r="http://schemas.openxmlformats.org/officeDocument/2006/relationships" id="2147483650" r:id="R337b6e4ee03742c7"/>
+    <p:sldLayoutId xmlns:r="http://schemas.openxmlformats.org/officeDocument/2006/relationships" id="2147483651" r:id="R00654b90173242ee"/>
+    <p:sldLayoutId xmlns:r="http://schemas.openxmlformats.org/officeDocument/2006/relationships" id="2147483652" r:id="R9f49a021cc9e49c6"/>
+    <p:sldLayoutId xmlns:r="http://schemas.openxmlformats.org/officeDocument/2006/relationships" id="2147483653" r:id="R1021dc56617a49e8"/>
   </p:sldLayoutIdLst>
 </p:sldMaster>
 </file>
@@ -1074,7 +1074,7 @@
           <a:bodyPr/>
           <a:lstStyle/>
           <a:p>
-            <a:fld id="{1A7FA1D8-8F82-48C1-BF44-7146745DB65D}" type="slidenum">
+            <a:fld id="{247CAF0D-EEDD-4257-90E6-3364BEA896B4}" type="slidenum">
               <a:rPr lang="en-US"/>
               <a:t>1</a:t>
             </a:fld>
@@ -1183,7 +1183,7 @@
           <a:bodyPr/>
           <a:lstStyle/>
           <a:p>
-            <a:fld id="{68C99C14-919F-4151-BA8E-5A30831E1485}" type="slidenum">
+            <a:fld id="{5D268583-3AAF-4A1A-9306-B3F91C5E5A86}" type="slidenum">
               <a:rPr lang="en-US"/>
               <a:t>1</a:t>
             </a:fld>
@@ -1286,7 +1286,7 @@
           <a:bodyPr/>
           <a:lstStyle/>
           <a:p>
-            <a:fld id="{E0B1CB9A-3D87-4CF2-A074-FCF19F8030AD}" type="slidenum">
+            <a:fld id="{7843DE03-FD44-4201-9160-BB4A37294EBC}" type="slidenum">
               <a:rPr lang="en-US"/>
               <a:t>1</a:t>
             </a:fld>

--- a/tests/OfficeAgent.Tests/Corpus/v1.0.0/native/outputs/p-headerfooter.pptx
+++ b/tests/OfficeAgent.Tests/Corpus/v1.0.0/native/outputs/p-headerfooter.pptx
@@ -2,12 +2,12 @@
 <file path=ppt/presentation.xml><?xml version="1.0" encoding="utf-8"?>
 <p:presentation xmlns:r="http://schemas.openxmlformats.org/officeDocument/2006/relationships" xmlns:p="http://schemas.openxmlformats.org/presentationml/2006/main">
   <p:sldMasterIdLst>
-    <p:sldMasterId xmlns:r="http://schemas.openxmlformats.org/officeDocument/2006/relationships" id="2147483648" r:id="R570c7f128a9d41bd"/>
+    <p:sldMasterId xmlns:r="http://schemas.openxmlformats.org/officeDocument/2006/relationships" id="2147483648" r:id="R8671b82465b14567"/>
   </p:sldMasterIdLst>
   <p:sldIdLst>
-    <p:sldId xmlns:r="http://schemas.openxmlformats.org/officeDocument/2006/relationships" id="256" r:id="R99ef8e78f19b43dd"/>
-    <p:sldId id="257" r:id="R93104dc9e1204b9f"/>
-    <p:sldId id="258" r:id="Rbefaa6c0b4f942e3"/>
+    <p:sldId xmlns:r="http://schemas.openxmlformats.org/officeDocument/2006/relationships" id="256" r:id="Rf6094db747aa49ac"/>
+    <p:sldId id="257" r:id="Rb0ad968aa62a4d22"/>
+    <p:sldId id="258" r:id="Redc77fc1bad94598"/>
   </p:sldIdLst>
   <p:sldSz cx="12192000" cy="6858000"/>
   <p:notesSz cx="6858000" cy="9144000"/>
@@ -892,11 +892,11 @@
   </p:cSld>
   <p:clrMap bg1="lt1" tx1="dk1" bg2="lt2" tx2="dk2" accent1="accent1" accent2="accent2" accent3="accent3" accent4="accent4" accent5="accent5" accent6="accent6" hlink="hlink" folHlink="folHlink"/>
   <p:sldLayoutIdLst>
-    <p:sldLayoutId xmlns:r="http://schemas.openxmlformats.org/officeDocument/2006/relationships" id="2147483649" r:id="R25cb8f6de14f42bd"/>
-    <p:sldLayoutId xmlns:r="http://schemas.openxmlformats.org/officeDocument/2006/relationships" id="2147483650" r:id="R337b6e4ee03742c7"/>
-    <p:sldLayoutId xmlns:r="http://schemas.openxmlformats.org/officeDocument/2006/relationships" id="2147483651" r:id="R00654b90173242ee"/>
-    <p:sldLayoutId xmlns:r="http://schemas.openxmlformats.org/officeDocument/2006/relationships" id="2147483652" r:id="R9f49a021cc9e49c6"/>
-    <p:sldLayoutId xmlns:r="http://schemas.openxmlformats.org/officeDocument/2006/relationships" id="2147483653" r:id="R1021dc56617a49e8"/>
+    <p:sldLayoutId xmlns:r="http://schemas.openxmlformats.org/officeDocument/2006/relationships" id="2147483649" r:id="R076690fbe9a04b4c"/>
+    <p:sldLayoutId xmlns:r="http://schemas.openxmlformats.org/officeDocument/2006/relationships" id="2147483650" r:id="Rcbbc7ec846664271"/>
+    <p:sldLayoutId xmlns:r="http://schemas.openxmlformats.org/officeDocument/2006/relationships" id="2147483651" r:id="Rcdfa314a6eb245f8"/>
+    <p:sldLayoutId xmlns:r="http://schemas.openxmlformats.org/officeDocument/2006/relationships" id="2147483652" r:id="R5eb83d97f29c418f"/>
+    <p:sldLayoutId xmlns:r="http://schemas.openxmlformats.org/officeDocument/2006/relationships" id="2147483653" r:id="R88ec123f8c51445d"/>
   </p:sldLayoutIdLst>
 </p:sldMaster>
 </file>
@@ -1074,7 +1074,7 @@
           <a:bodyPr/>
           <a:lstStyle/>
           <a:p>
-            <a:fld id="{247CAF0D-EEDD-4257-90E6-3364BEA896B4}" type="slidenum">
+            <a:fld id="{09B8226B-1E6F-4125-B54E-5D95FC9CD4F4}" type="slidenum">
               <a:rPr lang="en-US"/>
               <a:t>1</a:t>
             </a:fld>
@@ -1183,7 +1183,7 @@
           <a:bodyPr/>
           <a:lstStyle/>
           <a:p>
-            <a:fld id="{5D268583-3AAF-4A1A-9306-B3F91C5E5A86}" type="slidenum">
+            <a:fld id="{342DFD80-3C23-4D6B-B99C-A934849797B0}" type="slidenum">
               <a:rPr lang="en-US"/>
               <a:t>1</a:t>
             </a:fld>
@@ -1286,7 +1286,7 @@
           <a:bodyPr/>
           <a:lstStyle/>
           <a:p>
-            <a:fld id="{7843DE03-FD44-4201-9160-BB4A37294EBC}" type="slidenum">
+            <a:fld id="{E36A02DF-3E70-44D4-B55D-67B50A19CB5D}" type="slidenum">
               <a:rPr lang="en-US"/>
               <a:t>1</a:t>
             </a:fld>

--- a/tests/OfficeAgent.Tests/Corpus/v1.0.0/native/outputs/p-headerfooter.pptx
+++ b/tests/OfficeAgent.Tests/Corpus/v1.0.0/native/outputs/p-headerfooter.pptx
@@ -2,12 +2,12 @@
 <file path=ppt/presentation.xml><?xml version="1.0" encoding="utf-8"?>
 <p:presentation xmlns:r="http://schemas.openxmlformats.org/officeDocument/2006/relationships" xmlns:p="http://schemas.openxmlformats.org/presentationml/2006/main">
   <p:sldMasterIdLst>
-    <p:sldMasterId xmlns:r="http://schemas.openxmlformats.org/officeDocument/2006/relationships" id="2147483648" r:id="R8671b82465b14567"/>
+    <p:sldMasterId xmlns:r="http://schemas.openxmlformats.org/officeDocument/2006/relationships" id="2147483648" r:id="R9e7bfc662c7043e1"/>
   </p:sldMasterIdLst>
   <p:sldIdLst>
-    <p:sldId xmlns:r="http://schemas.openxmlformats.org/officeDocument/2006/relationships" id="256" r:id="Rf6094db747aa49ac"/>
-    <p:sldId id="257" r:id="Rb0ad968aa62a4d22"/>
-    <p:sldId id="258" r:id="Redc77fc1bad94598"/>
+    <p:sldId xmlns:r="http://schemas.openxmlformats.org/officeDocument/2006/relationships" id="256" r:id="Rb6a1431c92cc431c"/>
+    <p:sldId id="257" r:id="R989073af708c4124"/>
+    <p:sldId id="258" r:id="R2ecf014040db438a"/>
   </p:sldIdLst>
   <p:sldSz cx="12192000" cy="6858000"/>
   <p:notesSz cx="6858000" cy="9144000"/>
@@ -892,11 +892,11 @@
   </p:cSld>
   <p:clrMap bg1="lt1" tx1="dk1" bg2="lt2" tx2="dk2" accent1="accent1" accent2="accent2" accent3="accent3" accent4="accent4" accent5="accent5" accent6="accent6" hlink="hlink" folHlink="folHlink"/>
   <p:sldLayoutIdLst>
-    <p:sldLayoutId xmlns:r="http://schemas.openxmlformats.org/officeDocument/2006/relationships" id="2147483649" r:id="R076690fbe9a04b4c"/>
-    <p:sldLayoutId xmlns:r="http://schemas.openxmlformats.org/officeDocument/2006/relationships" id="2147483650" r:id="Rcbbc7ec846664271"/>
-    <p:sldLayoutId xmlns:r="http://schemas.openxmlformats.org/officeDocument/2006/relationships" id="2147483651" r:id="Rcdfa314a6eb245f8"/>
-    <p:sldLayoutId xmlns:r="http://schemas.openxmlformats.org/officeDocument/2006/relationships" id="2147483652" r:id="R5eb83d97f29c418f"/>
-    <p:sldLayoutId xmlns:r="http://schemas.openxmlformats.org/officeDocument/2006/relationships" id="2147483653" r:id="R88ec123f8c51445d"/>
+    <p:sldLayoutId xmlns:r="http://schemas.openxmlformats.org/officeDocument/2006/relationships" id="2147483649" r:id="R076197da0cee4335"/>
+    <p:sldLayoutId xmlns:r="http://schemas.openxmlformats.org/officeDocument/2006/relationships" id="2147483650" r:id="R60a01585d94244c1"/>
+    <p:sldLayoutId xmlns:r="http://schemas.openxmlformats.org/officeDocument/2006/relationships" id="2147483651" r:id="Rb3ea08b37e1f45c1"/>
+    <p:sldLayoutId xmlns:r="http://schemas.openxmlformats.org/officeDocument/2006/relationships" id="2147483652" r:id="Rd3b60acc5f60447a"/>
+    <p:sldLayoutId xmlns:r="http://schemas.openxmlformats.org/officeDocument/2006/relationships" id="2147483653" r:id="Rd7c829a3c47a4cfb"/>
   </p:sldLayoutIdLst>
 </p:sldMaster>
 </file>
@@ -1074,7 +1074,7 @@
           <a:bodyPr/>
           <a:lstStyle/>
           <a:p>
-            <a:fld id="{09B8226B-1E6F-4125-B54E-5D95FC9CD4F4}" type="slidenum">
+            <a:fld id="{4EF60018-795C-4971-B33C-EBA93322ECAD}" type="slidenum">
               <a:rPr lang="en-US"/>
               <a:t>1</a:t>
             </a:fld>
@@ -1183,7 +1183,7 @@
           <a:bodyPr/>
           <a:lstStyle/>
           <a:p>
-            <a:fld id="{342DFD80-3C23-4D6B-B99C-A934849797B0}" type="slidenum">
+            <a:fld id="{32176993-3B09-4951-BDB1-2E92864B613E}" type="slidenum">
               <a:rPr lang="en-US"/>
               <a:t>1</a:t>
             </a:fld>
@@ -1286,7 +1286,7 @@
           <a:bodyPr/>
           <a:lstStyle/>
           <a:p>
-            <a:fld id="{E36A02DF-3E70-44D4-B55D-67B50A19CB5D}" type="slidenum">
+            <a:fld id="{6EB2CA26-3453-4B75-9A44-FC9F30916F8E}" type="slidenum">
               <a:rPr lang="en-US"/>
               <a:t>1</a:t>
             </a:fld>

--- a/tests/OfficeAgent.Tests/Corpus/v1.0.0/native/outputs/p-headerfooter.pptx
+++ b/tests/OfficeAgent.Tests/Corpus/v1.0.0/native/outputs/p-headerfooter.pptx
@@ -2,12 +2,12 @@
 <file path=ppt/presentation.xml><?xml version="1.0" encoding="utf-8"?>
 <p:presentation xmlns:r="http://schemas.openxmlformats.org/officeDocument/2006/relationships" xmlns:p="http://schemas.openxmlformats.org/presentationml/2006/main">
   <p:sldMasterIdLst>
-    <p:sldMasterId xmlns:r="http://schemas.openxmlformats.org/officeDocument/2006/relationships" id="2147483648" r:id="R9e7bfc662c7043e1"/>
+    <p:sldMasterId xmlns:r="http://schemas.openxmlformats.org/officeDocument/2006/relationships" id="2147483648" r:id="R3a5f915cdc724fcc"/>
   </p:sldMasterIdLst>
   <p:sldIdLst>
-    <p:sldId xmlns:r="http://schemas.openxmlformats.org/officeDocument/2006/relationships" id="256" r:id="Rb6a1431c92cc431c"/>
-    <p:sldId id="257" r:id="R989073af708c4124"/>
-    <p:sldId id="258" r:id="R2ecf014040db438a"/>
+    <p:sldId xmlns:r="http://schemas.openxmlformats.org/officeDocument/2006/relationships" id="256" r:id="Rd693be35b6e842fa"/>
+    <p:sldId id="257" r:id="R6f3c2efa48394b41"/>
+    <p:sldId id="258" r:id="Rf37e43e42fcc4855"/>
   </p:sldIdLst>
   <p:sldSz cx="12192000" cy="6858000"/>
   <p:notesSz cx="6858000" cy="9144000"/>
@@ -892,11 +892,11 @@
   </p:cSld>
   <p:clrMap bg1="lt1" tx1="dk1" bg2="lt2" tx2="dk2" accent1="accent1" accent2="accent2" accent3="accent3" accent4="accent4" accent5="accent5" accent6="accent6" hlink="hlink" folHlink="folHlink"/>
   <p:sldLayoutIdLst>
-    <p:sldLayoutId xmlns:r="http://schemas.openxmlformats.org/officeDocument/2006/relationships" id="2147483649" r:id="R076197da0cee4335"/>
-    <p:sldLayoutId xmlns:r="http://schemas.openxmlformats.org/officeDocument/2006/relationships" id="2147483650" r:id="R60a01585d94244c1"/>
-    <p:sldLayoutId xmlns:r="http://schemas.openxmlformats.org/officeDocument/2006/relationships" id="2147483651" r:id="Rb3ea08b37e1f45c1"/>
-    <p:sldLayoutId xmlns:r="http://schemas.openxmlformats.org/officeDocument/2006/relationships" id="2147483652" r:id="Rd3b60acc5f60447a"/>
-    <p:sldLayoutId xmlns:r="http://schemas.openxmlformats.org/officeDocument/2006/relationships" id="2147483653" r:id="Rd7c829a3c47a4cfb"/>
+    <p:sldLayoutId xmlns:r="http://schemas.openxmlformats.org/officeDocument/2006/relationships" id="2147483649" r:id="R15038d8875d343d2"/>
+    <p:sldLayoutId xmlns:r="http://schemas.openxmlformats.org/officeDocument/2006/relationships" id="2147483650" r:id="Raa4cbfd07f3a4e0b"/>
+    <p:sldLayoutId xmlns:r="http://schemas.openxmlformats.org/officeDocument/2006/relationships" id="2147483651" r:id="Re02f4407ef2f4fac"/>
+    <p:sldLayoutId xmlns:r="http://schemas.openxmlformats.org/officeDocument/2006/relationships" id="2147483652" r:id="R4079cae215cd45e6"/>
+    <p:sldLayoutId xmlns:r="http://schemas.openxmlformats.org/officeDocument/2006/relationships" id="2147483653" r:id="R04499f5e7fe64b44"/>
   </p:sldLayoutIdLst>
 </p:sldMaster>
 </file>
@@ -1074,7 +1074,7 @@
           <a:bodyPr/>
           <a:lstStyle/>
           <a:p>
-            <a:fld id="{4EF60018-795C-4971-B33C-EBA93322ECAD}" type="slidenum">
+            <a:fld id="{B22190E6-DC0D-47F1-9428-E352F1E2F0F8}" type="slidenum">
               <a:rPr lang="en-US"/>
               <a:t>1</a:t>
             </a:fld>
@@ -1183,7 +1183,7 @@
           <a:bodyPr/>
           <a:lstStyle/>
           <a:p>
-            <a:fld id="{32176993-3B09-4951-BDB1-2E92864B613E}" type="slidenum">
+            <a:fld id="{315A6720-84D0-4FB6-A990-98C703EB1940}" type="slidenum">
               <a:rPr lang="en-US"/>
               <a:t>1</a:t>
             </a:fld>
@@ -1286,7 +1286,7 @@
           <a:bodyPr/>
           <a:lstStyle/>
           <a:p>
-            <a:fld id="{6EB2CA26-3453-4B75-9A44-FC9F30916F8E}" type="slidenum">
+            <a:fld id="{6EC56C76-825D-4E6B-8974-3E596A8F3BF7}" type="slidenum">
               <a:rPr lang="en-US"/>
               <a:t>1</a:t>
             </a:fld>
